--- a/dist/초3/수학/도형과측정/초3_수학_도형과측정_03_원의중심·반지름·지름.pptx
+++ b/dist/초3/수학/도형과측정/초3_수학_도형과측정_03_원의중심·반지름·지름.pptx
@@ -121,13 +121,13 @@
   <p:extLst>
     <p:ext uri="{521415D9-36F7-43E2-AB2F-B90AF26B5E84}">
       <p14:sectionLst xmlns:p14="http://schemas.microsoft.com/office/powerpoint/2010/main">
-        <p14:section name="도입" id="{a8a0c040-b43a-80ed-4c7d-6144a1cc637d}">
+        <p14:section name="도입" id="{b809721a-3516-a721-dd53-b6e37ce3c6cc}">
           <p14:sldIdLst>
             <p14:sldId id="256"/>
             <p14:sldId id="257"/>
           </p14:sldIdLst>
         </p14:section>
-        <p14:section name="개념" id="{3e3c9850-4a75-cca6-8378-50aedb3ede08}">
+        <p14:section name="개념" id="{9d314394-0906-7759-4537-9cf890e229f7}">
           <p14:sldIdLst>
             <p14:sldId id="258"/>
             <p14:sldId id="259"/>
@@ -136,32 +136,32 @@
             <p14:sldId id="264"/>
           </p14:sldIdLst>
         </p14:section>
-        <p14:section name="연습" id="{adbbfba9-e56f-f163-1691-70b367072191}">
+        <p14:section name="연습" id="{12e7ec36-e8d2-d477-d606-60dc0b212e15}">
           <p14:sldIdLst>
             <p14:sldId id="262"/>
             <p14:sldId id="263"/>
             <p14:sldId id="265"/>
           </p14:sldIdLst>
         </p14:section>
-        <p14:section name="개념" id="{b7180dab-716d-6da3-6921-754b3f346c55}">
+        <p14:section name="개념" id="{ff31e2e7-0e1e-cfb4-b76d-319e9d232301}">
           <p14:sldIdLst/>
         </p14:section>
-        <p14:section name="연습" id="{53b18bf7-9c60-6632-31c9-ec06393d4500}">
+        <p14:section name="연습" id="{33d3414c-9a8b-6a8b-65f2-c76fe658300d}">
           <p14:sldIdLst/>
         </p14:section>
-        <p14:section name="확인" id="{ddbdc22d-1180-b96a-a338-f048c1e51c1b}">
+        <p14:section name="확인" id="{a4d2d61b-94f9-3140-f17a-bc66b540743d}">
           <p14:sldIdLst>
             <p14:sldId id="266"/>
             <p14:sldId id="267"/>
             <p14:sldId id="268"/>
           </p14:sldIdLst>
         </p14:section>
-        <p14:section name="정리" id="{a5617e89-2d22-338d-2e0b-7dc8ef0de8de}">
+        <p14:section name="정리" id="{50986b0b-ede6-e021-eecc-668f21cd3208}">
           <p14:sldIdLst>
             <p14:sldId id="269"/>
           </p14:sldIdLst>
         </p14:section>
-        <p14:section name="보충" id="{84553be1-d0ae-0de3-03f3-3184a69a4eab}">
+        <p14:section name="보충" id="{0b9c7757-00b1-cb7d-7b75-a6a5c08800b4}">
           <p14:sldIdLst>
             <p14:sldId id="270"/>
           </p14:sldIdLst>
@@ -3174,8 +3174,8 @@
         </p:nvSpPr>
         <p:spPr>
           <a:xfrm>
-            <a:off x="8671560" y="1127760"/>
-            <a:ext cx="1950720" cy="1950720"/>
+            <a:off x="8549640" y="1005840"/>
+            <a:ext cx="2194560" cy="2194560"/>
           </a:xfrm>
           <a:prstGeom prst="ellipse">
             <a:avLst/>
@@ -3197,8 +3197,8 @@
         </p:nvSpPr>
         <p:spPr>
           <a:xfrm flipV="1">
-            <a:off x="9646920" y="1615440"/>
-            <a:ext cx="844662" cy="487680"/>
+            <a:off x="9646920" y="1554480"/>
+            <a:ext cx="950244" cy="548640"/>
           </a:xfrm>
           <a:prstGeom prst="line">
             <a:avLst/>
@@ -3245,7 +3245,7 @@
         </p:nvSpPr>
         <p:spPr>
           <a:xfrm>
-            <a:off x="10432146" y="1556004"/>
+            <a:off x="10537728" y="1495044"/>
             <a:ext cx="118872" cy="118872"/>
           </a:xfrm>
           <a:prstGeom prst="ellipse">
@@ -3270,8 +3270,8 @@
         </p:nvSpPr>
         <p:spPr>
           <a:xfrm>
-            <a:off x="9442704" y="2156460"/>
-            <a:ext cx="408432" cy="381000"/>
+            <a:off x="9392920" y="2092960"/>
+            <a:ext cx="508000" cy="508000"/>
           </a:xfrm>
           <a:prstGeom prst="rect">
             <a:avLst/>
@@ -3287,7 +3287,7 @@
               <a:buNone/>
             </a:pPr>
             <a:r>
-              <a:rPr lang="ko-KR" altLang="en-US" sz="2400" b="1" dirty="0">
+              <a:rPr lang="ko-KR" altLang="en-US" sz="3200" b="1" dirty="0">
                 <a:solidFill>
                   <a:srgbClr val="1F2937"/>
                 </a:solidFill>
@@ -3297,7 +3297,7 @@
               </a:rPr>
               <a:t>ㅇ</a:t>
             </a:r>
-            <a:endParaRPr lang="ko-KR" sz="2400" dirty="0"/>
+            <a:endParaRPr lang="ko-KR" sz="3200" dirty="0"/>
           </a:p>
         </p:txBody>
       </p:sp>
@@ -3309,8 +3309,8 @@
         </p:nvSpPr>
         <p:spPr>
           <a:xfrm>
-            <a:off x="10498536" y="1303017"/>
-            <a:ext cx="408432" cy="381000"/>
+            <a:off x="10554335" y="1178557"/>
+            <a:ext cx="508000" cy="508000"/>
           </a:xfrm>
           <a:prstGeom prst="rect">
             <a:avLst/>
@@ -3326,7 +3326,7 @@
               <a:buNone/>
             </a:pPr>
             <a:r>
-              <a:rPr lang="ko-KR" altLang="en-US" sz="2400" b="1" dirty="0">
+              <a:rPr lang="ko-KR" altLang="en-US" sz="3200" b="1" dirty="0">
                 <a:solidFill>
                   <a:srgbClr val="1F2937"/>
                 </a:solidFill>
@@ -3336,7 +3336,7 @@
               </a:rPr>
               <a:t>ㄱ</a:t>
             </a:r>
-            <a:endParaRPr lang="ko-KR" sz="2400" dirty="0"/>
+            <a:endParaRPr lang="ko-KR" sz="3200" dirty="0"/>
           </a:p>
         </p:txBody>
       </p:sp>
@@ -4042,8 +4042,8 @@
         </p:nvSpPr>
         <p:spPr>
           <a:xfrm>
-            <a:off x="7343394" y="2499360"/>
-            <a:ext cx="3230880" cy="3230880"/>
+            <a:off x="7221474" y="2377440"/>
+            <a:ext cx="3474720" cy="3474720"/>
           </a:xfrm>
           <a:prstGeom prst="ellipse">
             <a:avLst/>
@@ -4066,7 +4066,7 @@
         <p:spPr>
           <a:xfrm>
             <a:off x="8958834" y="4114800"/>
-            <a:ext cx="1615440" cy="0"/>
+            <a:ext cx="1737360" cy="0"/>
           </a:xfrm>
           <a:prstGeom prst="line">
             <a:avLst/>
@@ -4088,7 +4088,7 @@
         </p:nvSpPr>
         <p:spPr>
           <a:xfrm>
-            <a:off x="9355074" y="3665220"/>
+            <a:off x="9416034" y="3649980"/>
             <a:ext cx="822960" cy="381000"/>
           </a:xfrm>
           <a:prstGeom prst="rect">
@@ -4152,7 +4152,7 @@
         </p:nvSpPr>
         <p:spPr>
           <a:xfrm>
-            <a:off x="10514838" y="4055364"/>
+            <a:off x="10636758" y="4055364"/>
             <a:ext cx="118872" cy="118872"/>
           </a:xfrm>
           <a:prstGeom prst="ellipse">
@@ -4177,8 +4177,8 @@
         </p:nvSpPr>
         <p:spPr>
           <a:xfrm>
-            <a:off x="8510778" y="3924300"/>
-            <a:ext cx="408432" cy="381000"/>
+            <a:off x="8460994" y="3860800"/>
+            <a:ext cx="508000" cy="508000"/>
           </a:xfrm>
           <a:prstGeom prst="rect">
             <a:avLst/>
@@ -4194,7 +4194,7 @@
               <a:buNone/>
             </a:pPr>
             <a:r>
-              <a:rPr lang="ko-KR" altLang="en-US" sz="2400" b="1" dirty="0">
+              <a:rPr lang="ko-KR" altLang="en-US" sz="3200" b="1" dirty="0">
                 <a:solidFill>
                   <a:srgbClr val="1F2937"/>
                 </a:solidFill>
@@ -4204,7 +4204,7 @@
               </a:rPr>
               <a:t>ㅇ</a:t>
             </a:r>
-            <a:endParaRPr lang="ko-KR" sz="2400" dirty="0"/>
+            <a:endParaRPr lang="ko-KR" sz="3200" dirty="0"/>
           </a:p>
         </p:txBody>
       </p:sp>
@@ -4216,8 +4216,8 @@
         </p:nvSpPr>
         <p:spPr>
           <a:xfrm>
-            <a:off x="10613898" y="3924300"/>
-            <a:ext cx="408432" cy="381000"/>
+            <a:off x="10686034" y="3860800"/>
+            <a:ext cx="508000" cy="508000"/>
           </a:xfrm>
           <a:prstGeom prst="rect">
             <a:avLst/>
@@ -4233,7 +4233,7 @@
               <a:buNone/>
             </a:pPr>
             <a:r>
-              <a:rPr lang="ko-KR" altLang="en-US" sz="2400" b="1" dirty="0">
+              <a:rPr lang="ko-KR" altLang="en-US" sz="3200" b="1" dirty="0">
                 <a:solidFill>
                   <a:srgbClr val="1F2937"/>
                 </a:solidFill>
@@ -4243,7 +4243,7 @@
               </a:rPr>
               <a:t>ㄱ</a:t>
             </a:r>
-            <a:endParaRPr lang="ko-KR" sz="2400" dirty="0"/>
+            <a:endParaRPr lang="ko-KR" sz="3200" dirty="0"/>
           </a:p>
         </p:txBody>
       </p:sp>
@@ -8350,8 +8350,8 @@
         </p:nvSpPr>
         <p:spPr>
           <a:xfrm>
-            <a:off x="2163318" y="2499360"/>
-            <a:ext cx="2133600" cy="2133600"/>
+            <a:off x="2041398" y="2377440"/>
+            <a:ext cx="2377440" cy="2377440"/>
           </a:xfrm>
           <a:prstGeom prst="ellipse">
             <a:avLst/>
@@ -8374,7 +8374,7 @@
         <p:spPr>
           <a:xfrm>
             <a:off x="3230118" y="3566160"/>
-            <a:ext cx="1066800" cy="0"/>
+            <a:ext cx="1188720" cy="0"/>
           </a:xfrm>
           <a:prstGeom prst="line">
             <a:avLst/>
@@ -8396,8 +8396,8 @@
         </p:nvSpPr>
         <p:spPr>
           <a:xfrm flipV="1">
-            <a:off x="3230118" y="2499360"/>
-            <a:ext cx="0" cy="1066800"/>
+            <a:off x="3230118" y="2377440"/>
+            <a:ext cx="0" cy="1188720"/>
           </a:xfrm>
           <a:prstGeom prst="line">
             <a:avLst/>
@@ -8419,8 +8419,8 @@
         </p:nvSpPr>
         <p:spPr>
           <a:xfrm flipH="1">
-            <a:off x="2306269" y="3566160"/>
-            <a:ext cx="923849" cy="533400"/>
+            <a:off x="2200686" y="3566160"/>
+            <a:ext cx="1029432" cy="594360"/>
           </a:xfrm>
           <a:prstGeom prst="line">
             <a:avLst/>
@@ -8467,7 +8467,7 @@
         </p:nvSpPr>
         <p:spPr>
           <a:xfrm>
-            <a:off x="4237482" y="3506724"/>
+            <a:off x="4359402" y="3506724"/>
             <a:ext cx="118872" cy="118872"/>
           </a:xfrm>
           <a:prstGeom prst="ellipse">
@@ -8492,7 +8492,7 @@
         </p:nvSpPr>
         <p:spPr>
           <a:xfrm>
-            <a:off x="3170682" y="2439924"/>
+            <a:off x="3170682" y="2318004"/>
             <a:ext cx="118872" cy="118872"/>
           </a:xfrm>
           <a:prstGeom prst="ellipse">
@@ -8517,7 +8517,7 @@
         </p:nvSpPr>
         <p:spPr>
           <a:xfrm>
-            <a:off x="2246833" y="4040124"/>
+            <a:off x="2141250" y="4101084"/>
             <a:ext cx="118872" cy="118872"/>
           </a:xfrm>
           <a:prstGeom prst="ellipse">
@@ -8542,8 +8542,8 @@
         </p:nvSpPr>
         <p:spPr>
           <a:xfrm>
-            <a:off x="3198323" y="3548081"/>
-            <a:ext cx="408432" cy="381000"/>
+            <a:off x="3148539" y="3484581"/>
+            <a:ext cx="508000" cy="508000"/>
           </a:xfrm>
           <a:prstGeom prst="rect">
             <a:avLst/>
@@ -8559,7 +8559,7 @@
               <a:buNone/>
             </a:pPr>
             <a:r>
-              <a:rPr lang="ko-KR" altLang="en-US" sz="2400" b="1" dirty="0">
+              <a:rPr lang="ko-KR" altLang="en-US" sz="3200" b="1" dirty="0">
                 <a:solidFill>
                   <a:srgbClr val="1F2937"/>
                 </a:solidFill>
@@ -8569,7 +8569,7 @@
               </a:rPr>
               <a:t>ㅇ</a:t>
             </a:r>
-            <a:endParaRPr lang="ko-KR" sz="2400" dirty="0"/>
+            <a:endParaRPr lang="ko-KR" sz="3200" dirty="0"/>
           </a:p>
         </p:txBody>
       </p:sp>
@@ -8581,8 +8581,8 @@
         </p:nvSpPr>
         <p:spPr>
           <a:xfrm>
-            <a:off x="4336542" y="3375660"/>
-            <a:ext cx="408432" cy="381000"/>
+            <a:off x="4408678" y="3312160"/>
+            <a:ext cx="508000" cy="508000"/>
           </a:xfrm>
           <a:prstGeom prst="rect">
             <a:avLst/>
@@ -8598,7 +8598,7 @@
               <a:buNone/>
             </a:pPr>
             <a:r>
-              <a:rPr lang="ko-KR" altLang="en-US" sz="2400" b="1" dirty="0">
+              <a:rPr lang="ko-KR" altLang="en-US" sz="3200" b="1" dirty="0">
                 <a:solidFill>
                   <a:srgbClr val="1F2937"/>
                 </a:solidFill>
@@ -8608,7 +8608,7 @@
               </a:rPr>
               <a:t>ㄱ</a:t>
             </a:r>
-            <a:endParaRPr lang="ko-KR" sz="2400" dirty="0"/>
+            <a:endParaRPr lang="ko-KR" sz="3200" dirty="0"/>
           </a:p>
         </p:txBody>
       </p:sp>
@@ -8620,8 +8620,8 @@
         </p:nvSpPr>
         <p:spPr>
           <a:xfrm>
-            <a:off x="3025902" y="2065020"/>
-            <a:ext cx="408432" cy="381000"/>
+            <a:off x="2976118" y="1879600"/>
+            <a:ext cx="508000" cy="508000"/>
           </a:xfrm>
           <a:prstGeom prst="rect">
             <a:avLst/>
@@ -8637,7 +8637,7 @@
               <a:buNone/>
             </a:pPr>
             <a:r>
-              <a:rPr lang="ko-KR" altLang="en-US" sz="2400" b="1" dirty="0">
+              <a:rPr lang="ko-KR" altLang="en-US" sz="3200" b="1" dirty="0">
                 <a:solidFill>
                   <a:srgbClr val="1F2937"/>
                 </a:solidFill>
@@ -8647,7 +8647,7 @@
               </a:rPr>
               <a:t>ㄴ</a:t>
             </a:r>
-            <a:endParaRPr lang="ko-KR" sz="2400" dirty="0"/>
+            <a:endParaRPr lang="ko-KR" sz="3200" dirty="0"/>
           </a:p>
         </p:txBody>
       </p:sp>
@@ -8659,8 +8659,8 @@
         </p:nvSpPr>
         <p:spPr>
           <a:xfrm>
-            <a:off x="1890883" y="4030983"/>
-            <a:ext cx="408432" cy="381000"/>
+            <a:off x="1735516" y="4028443"/>
+            <a:ext cx="508000" cy="508000"/>
           </a:xfrm>
           <a:prstGeom prst="rect">
             <a:avLst/>
@@ -8676,7 +8676,7 @@
               <a:buNone/>
             </a:pPr>
             <a:r>
-              <a:rPr lang="ko-KR" altLang="en-US" sz="2400" b="1" dirty="0">
+              <a:rPr lang="ko-KR" altLang="en-US" sz="3200" b="1" dirty="0">
                 <a:solidFill>
                   <a:srgbClr val="1F2937"/>
                 </a:solidFill>
@@ -8686,7 +8686,7 @@
               </a:rPr>
               <a:t>ㄷ</a:t>
             </a:r>
-            <a:endParaRPr lang="ko-KR" sz="2400" dirty="0"/>
+            <a:endParaRPr lang="ko-KR" sz="3200" dirty="0"/>
           </a:p>
         </p:txBody>
       </p:sp>
@@ -9098,8 +9098,8 @@
         </p:nvSpPr>
         <p:spPr>
           <a:xfrm>
-            <a:off x="2163318" y="2499360"/>
-            <a:ext cx="2133600" cy="2133600"/>
+            <a:off x="2041398" y="2377440"/>
+            <a:ext cx="2377440" cy="2377440"/>
           </a:xfrm>
           <a:prstGeom prst="ellipse">
             <a:avLst/>
@@ -9121,8 +9121,8 @@
         </p:nvSpPr>
         <p:spPr>
           <a:xfrm>
-            <a:off x="2163318" y="3566160"/>
-            <a:ext cx="2133600" cy="0"/>
+            <a:off x="2041398" y="3566160"/>
+            <a:ext cx="2377440" cy="0"/>
           </a:xfrm>
           <a:prstGeom prst="line">
             <a:avLst/>
@@ -9144,8 +9144,8 @@
         </p:nvSpPr>
         <p:spPr>
           <a:xfrm>
-            <a:off x="2376678" y="2926080"/>
-            <a:ext cx="1706880" cy="0"/>
+            <a:off x="2279142" y="2852928"/>
+            <a:ext cx="1901952" cy="0"/>
           </a:xfrm>
           <a:prstGeom prst="line">
             <a:avLst/>
@@ -9192,7 +9192,7 @@
         </p:nvSpPr>
         <p:spPr>
           <a:xfrm>
-            <a:off x="2103882" y="3506724"/>
+            <a:off x="1981962" y="3506724"/>
             <a:ext cx="118872" cy="118872"/>
           </a:xfrm>
           <a:prstGeom prst="ellipse">
@@ -9217,7 +9217,7 @@
         </p:nvSpPr>
         <p:spPr>
           <a:xfrm>
-            <a:off x="4237482" y="3506724"/>
+            <a:off x="4359402" y="3506724"/>
             <a:ext cx="118872" cy="118872"/>
           </a:xfrm>
           <a:prstGeom prst="ellipse">
@@ -9242,7 +9242,7 @@
         </p:nvSpPr>
         <p:spPr>
           <a:xfrm>
-            <a:off x="2317242" y="2866644"/>
+            <a:off x="2219706" y="2793492"/>
             <a:ext cx="118872" cy="118872"/>
           </a:xfrm>
           <a:prstGeom prst="ellipse">
@@ -9267,7 +9267,7 @@
         </p:nvSpPr>
         <p:spPr>
           <a:xfrm>
-            <a:off x="4024122" y="2866644"/>
+            <a:off x="4121658" y="2793492"/>
             <a:ext cx="118872" cy="118872"/>
           </a:xfrm>
           <a:prstGeom prst="ellipse">
@@ -9292,8 +9292,8 @@
         </p:nvSpPr>
         <p:spPr>
           <a:xfrm>
-            <a:off x="3025902" y="3619500"/>
-            <a:ext cx="408432" cy="381000"/>
+            <a:off x="2976118" y="3556000"/>
+            <a:ext cx="508000" cy="508000"/>
           </a:xfrm>
           <a:prstGeom prst="rect">
             <a:avLst/>
@@ -9309,7 +9309,7 @@
               <a:buNone/>
             </a:pPr>
             <a:r>
-              <a:rPr lang="ko-KR" altLang="en-US" sz="2400" b="1" dirty="0">
+              <a:rPr lang="ko-KR" altLang="en-US" sz="3200" b="1" dirty="0">
                 <a:solidFill>
                   <a:srgbClr val="1F2937"/>
                 </a:solidFill>
@@ -9319,7 +9319,7 @@
               </a:rPr>
               <a:t>ㅇ</a:t>
             </a:r>
-            <a:endParaRPr lang="ko-KR" sz="2400" dirty="0"/>
+            <a:endParaRPr lang="ko-KR" sz="3200" dirty="0"/>
           </a:p>
         </p:txBody>
       </p:sp>
@@ -9331,8 +9331,8 @@
         </p:nvSpPr>
         <p:spPr>
           <a:xfrm>
-            <a:off x="1715262" y="3375660"/>
-            <a:ext cx="408432" cy="381000"/>
+            <a:off x="1543558" y="3312160"/>
+            <a:ext cx="508000" cy="508000"/>
           </a:xfrm>
           <a:prstGeom prst="rect">
             <a:avLst/>
@@ -9348,7 +9348,7 @@
               <a:buNone/>
             </a:pPr>
             <a:r>
-              <a:rPr lang="ko-KR" altLang="en-US" sz="2400" b="1" dirty="0">
+              <a:rPr lang="ko-KR" altLang="en-US" sz="3200" b="1" dirty="0">
                 <a:solidFill>
                   <a:srgbClr val="1F2937"/>
                 </a:solidFill>
@@ -9358,7 +9358,7 @@
               </a:rPr>
               <a:t>ㄱ</a:t>
             </a:r>
-            <a:endParaRPr lang="ko-KR" sz="2400" dirty="0"/>
+            <a:endParaRPr lang="ko-KR" sz="3200" dirty="0"/>
           </a:p>
         </p:txBody>
       </p:sp>
@@ -9370,8 +9370,8 @@
         </p:nvSpPr>
         <p:spPr>
           <a:xfrm>
-            <a:off x="4336542" y="3375660"/>
-            <a:ext cx="408432" cy="381000"/>
+            <a:off x="4408678" y="3312160"/>
+            <a:ext cx="508000" cy="508000"/>
           </a:xfrm>
           <a:prstGeom prst="rect">
             <a:avLst/>
@@ -9387,7 +9387,7 @@
               <a:buNone/>
             </a:pPr>
             <a:r>
-              <a:rPr lang="ko-KR" altLang="en-US" sz="2400" b="1" dirty="0">
+              <a:rPr lang="ko-KR" altLang="en-US" sz="3200" b="1" dirty="0">
                 <a:solidFill>
                   <a:srgbClr val="1F2937"/>
                 </a:solidFill>
@@ -9397,7 +9397,7 @@
               </a:rPr>
               <a:t>ㄴ</a:t>
             </a:r>
-            <a:endParaRPr lang="ko-KR" sz="2400" dirty="0"/>
+            <a:endParaRPr lang="ko-KR" sz="3200" dirty="0"/>
           </a:p>
         </p:txBody>
       </p:sp>
@@ -9409,8 +9409,8 @@
         </p:nvSpPr>
         <p:spPr>
           <a:xfrm>
-            <a:off x="1928622" y="2735580"/>
-            <a:ext cx="408432" cy="381000"/>
+            <a:off x="1781302" y="2598928"/>
+            <a:ext cx="508000" cy="508000"/>
           </a:xfrm>
           <a:prstGeom prst="rect">
             <a:avLst/>
@@ -9426,7 +9426,7 @@
               <a:buNone/>
             </a:pPr>
             <a:r>
-              <a:rPr lang="ko-KR" altLang="en-US" sz="2400" b="1" dirty="0">
+              <a:rPr lang="ko-KR" altLang="en-US" sz="3200" b="1" dirty="0">
                 <a:solidFill>
                   <a:srgbClr val="1F2937"/>
                 </a:solidFill>
@@ -9436,7 +9436,7 @@
               </a:rPr>
               <a:t>ㄷ</a:t>
             </a:r>
-            <a:endParaRPr lang="ko-KR" sz="2400" dirty="0"/>
+            <a:endParaRPr lang="ko-KR" sz="3200" dirty="0"/>
           </a:p>
         </p:txBody>
       </p:sp>
@@ -9448,8 +9448,8 @@
         </p:nvSpPr>
         <p:spPr>
           <a:xfrm>
-            <a:off x="4123182" y="2735580"/>
-            <a:ext cx="408432" cy="381000"/>
+            <a:off x="4170934" y="2598928"/>
+            <a:ext cx="508000" cy="508000"/>
           </a:xfrm>
           <a:prstGeom prst="rect">
             <a:avLst/>
@@ -9465,7 +9465,7 @@
               <a:buNone/>
             </a:pPr>
             <a:r>
-              <a:rPr lang="ko-KR" altLang="en-US" sz="2400" b="1" dirty="0">
+              <a:rPr lang="ko-KR" altLang="en-US" sz="3200" b="1" dirty="0">
                 <a:solidFill>
                   <a:srgbClr val="1F2937"/>
                 </a:solidFill>
@@ -9475,7 +9475,7 @@
               </a:rPr>
               <a:t>ㄹ</a:t>
             </a:r>
-            <a:endParaRPr lang="ko-KR" sz="2400" dirty="0"/>
+            <a:endParaRPr lang="ko-KR" sz="3200" dirty="0"/>
           </a:p>
         </p:txBody>
       </p:sp>
@@ -9818,8 +9818,8 @@
         </p:nvSpPr>
         <p:spPr>
           <a:xfrm>
-            <a:off x="1614678" y="2499360"/>
-            <a:ext cx="3230880" cy="3230880"/>
+            <a:off x="1492758" y="2377440"/>
+            <a:ext cx="3474720" cy="3474720"/>
           </a:xfrm>
           <a:prstGeom prst="ellipse">
             <a:avLst/>
@@ -9841,8 +9841,8 @@
         </p:nvSpPr>
         <p:spPr>
           <a:xfrm>
-            <a:off x="1614678" y="4114800"/>
-            <a:ext cx="3230880" cy="0"/>
+            <a:off x="1492758" y="4114800"/>
+            <a:ext cx="3474720" cy="0"/>
           </a:xfrm>
           <a:prstGeom prst="line">
             <a:avLst/>
@@ -9864,8 +9864,8 @@
         </p:nvSpPr>
         <p:spPr>
           <a:xfrm flipV="1">
-            <a:off x="3230118" y="2499360"/>
-            <a:ext cx="0" cy="1615440"/>
+            <a:off x="3230118" y="2377440"/>
+            <a:ext cx="0" cy="1737360"/>
           </a:xfrm>
           <a:prstGeom prst="line">
             <a:avLst/>
@@ -9887,7 +9887,7 @@
         </p:nvSpPr>
         <p:spPr>
           <a:xfrm>
-            <a:off x="2818638" y="4183380"/>
+            <a:off x="2818638" y="4198620"/>
             <a:ext cx="822960" cy="381000"/>
           </a:xfrm>
           <a:prstGeom prst="rect">
@@ -9926,7 +9926,7 @@
         </p:nvSpPr>
         <p:spPr>
           <a:xfrm>
-            <a:off x="2254758" y="3116580"/>
+            <a:off x="2398014" y="3055620"/>
             <a:ext cx="822960" cy="381000"/>
           </a:xfrm>
           <a:prstGeom prst="rect">
@@ -9990,7 +9990,7 @@
         </p:nvSpPr>
         <p:spPr>
           <a:xfrm>
-            <a:off x="1555242" y="4055364"/>
+            <a:off x="1433322" y="4055364"/>
             <a:ext cx="118872" cy="118872"/>
           </a:xfrm>
           <a:prstGeom prst="ellipse">
@@ -10015,7 +10015,7 @@
         </p:nvSpPr>
         <p:spPr>
           <a:xfrm>
-            <a:off x="4786122" y="4055364"/>
+            <a:off x="4908042" y="4055364"/>
             <a:ext cx="118872" cy="118872"/>
           </a:xfrm>
           <a:prstGeom prst="ellipse">
@@ -10040,7 +10040,7 @@
         </p:nvSpPr>
         <p:spPr>
           <a:xfrm>
-            <a:off x="3170682" y="2439924"/>
+            <a:off x="3170682" y="2318004"/>
             <a:ext cx="118872" cy="118872"/>
           </a:xfrm>
           <a:prstGeom prst="ellipse">
@@ -10065,8 +10065,8 @@
         </p:nvSpPr>
         <p:spPr>
           <a:xfrm>
-            <a:off x="2853481" y="3751879"/>
-            <a:ext cx="408432" cy="381000"/>
+            <a:off x="2803697" y="3688379"/>
+            <a:ext cx="508000" cy="508000"/>
           </a:xfrm>
           <a:prstGeom prst="rect">
             <a:avLst/>
@@ -10082,7 +10082,7 @@
               <a:buNone/>
             </a:pPr>
             <a:r>
-              <a:rPr lang="ko-KR" altLang="en-US" sz="2400" b="1" dirty="0">
+              <a:rPr lang="ko-KR" altLang="en-US" sz="3200" b="1" dirty="0">
                 <a:solidFill>
                   <a:srgbClr val="1F2937"/>
                 </a:solidFill>
@@ -10092,7 +10092,7 @@
               </a:rPr>
               <a:t>ㅇ</a:t>
             </a:r>
-            <a:endParaRPr lang="ko-KR" sz="2400" dirty="0"/>
+            <a:endParaRPr lang="ko-KR" sz="3200" dirty="0"/>
           </a:p>
         </p:txBody>
       </p:sp>
@@ -10104,8 +10104,8 @@
         </p:nvSpPr>
         <p:spPr>
           <a:xfrm>
-            <a:off x="1166622" y="3924300"/>
-            <a:ext cx="408432" cy="381000"/>
+            <a:off x="994918" y="3860800"/>
+            <a:ext cx="508000" cy="508000"/>
           </a:xfrm>
           <a:prstGeom prst="rect">
             <a:avLst/>
@@ -10121,7 +10121,7 @@
               <a:buNone/>
             </a:pPr>
             <a:r>
-              <a:rPr lang="ko-KR" altLang="en-US" sz="2400" b="1" dirty="0">
+              <a:rPr lang="ko-KR" altLang="en-US" sz="3200" b="1" dirty="0">
                 <a:solidFill>
                   <a:srgbClr val="1F2937"/>
                 </a:solidFill>
@@ -10131,7 +10131,7 @@
               </a:rPr>
               <a:t>ㄱ</a:t>
             </a:r>
-            <a:endParaRPr lang="ko-KR" sz="2400" dirty="0"/>
+            <a:endParaRPr lang="ko-KR" sz="3200" dirty="0"/>
           </a:p>
         </p:txBody>
       </p:sp>
@@ -10143,8 +10143,8 @@
         </p:nvSpPr>
         <p:spPr>
           <a:xfrm>
-            <a:off x="4885182" y="3924300"/>
-            <a:ext cx="408432" cy="381000"/>
+            <a:off x="4957318" y="3860800"/>
+            <a:ext cx="508000" cy="508000"/>
           </a:xfrm>
           <a:prstGeom prst="rect">
             <a:avLst/>
@@ -10160,7 +10160,7 @@
               <a:buNone/>
             </a:pPr>
             <a:r>
-              <a:rPr lang="ko-KR" altLang="en-US" sz="2400" b="1" dirty="0">
+              <a:rPr lang="ko-KR" altLang="en-US" sz="3200" b="1" dirty="0">
                 <a:solidFill>
                   <a:srgbClr val="1F2937"/>
                 </a:solidFill>
@@ -10170,7 +10170,7 @@
               </a:rPr>
               <a:t>ㄴ</a:t>
             </a:r>
-            <a:endParaRPr lang="ko-KR" sz="2400" dirty="0"/>
+            <a:endParaRPr lang="ko-KR" sz="3200" dirty="0"/>
           </a:p>
         </p:txBody>
       </p:sp>
@@ -10182,8 +10182,8 @@
         </p:nvSpPr>
         <p:spPr>
           <a:xfrm>
-            <a:off x="3025902" y="2065020"/>
-            <a:ext cx="408432" cy="381000"/>
+            <a:off x="2976118" y="1879600"/>
+            <a:ext cx="508000" cy="508000"/>
           </a:xfrm>
           <a:prstGeom prst="rect">
             <a:avLst/>
@@ -10199,7 +10199,7 @@
               <a:buNone/>
             </a:pPr>
             <a:r>
-              <a:rPr lang="ko-KR" altLang="en-US" sz="2400" b="1" dirty="0">
+              <a:rPr lang="ko-KR" altLang="en-US" sz="3200" b="1" dirty="0">
                 <a:solidFill>
                   <a:srgbClr val="1F2937"/>
                 </a:solidFill>
@@ -10209,7 +10209,7 @@
               </a:rPr>
               <a:t>ㄷ</a:t>
             </a:r>
-            <a:endParaRPr lang="ko-KR" sz="2400" dirty="0"/>
+            <a:endParaRPr lang="ko-KR" sz="3200" dirty="0"/>
           </a:p>
         </p:txBody>
       </p:sp>
@@ -10621,8 +10621,8 @@
         </p:nvSpPr>
         <p:spPr>
           <a:xfrm>
-            <a:off x="7892034" y="2499360"/>
-            <a:ext cx="2133600" cy="2133600"/>
+            <a:off x="7770114" y="2377440"/>
+            <a:ext cx="2377440" cy="2377440"/>
           </a:xfrm>
           <a:prstGeom prst="ellipse">
             <a:avLst/>
@@ -10644,8 +10644,8 @@
         </p:nvSpPr>
         <p:spPr>
           <a:xfrm>
-            <a:off x="7892034" y="3566160"/>
-            <a:ext cx="2133600" cy="0"/>
+            <a:off x="7770114" y="3566160"/>
+            <a:ext cx="2377440" cy="0"/>
           </a:xfrm>
           <a:prstGeom prst="line">
             <a:avLst/>
@@ -10667,7 +10667,7 @@
         </p:nvSpPr>
         <p:spPr>
           <a:xfrm>
-            <a:off x="8446770" y="3634740"/>
+            <a:off x="8446770" y="3649980"/>
             <a:ext cx="1024128" cy="381000"/>
           </a:xfrm>
           <a:prstGeom prst="rect">
@@ -10731,7 +10731,7 @@
         </p:nvSpPr>
         <p:spPr>
           <a:xfrm>
-            <a:off x="7832598" y="3506724"/>
+            <a:off x="7710678" y="3506724"/>
             <a:ext cx="118872" cy="118872"/>
           </a:xfrm>
           <a:prstGeom prst="ellipse">
@@ -10756,7 +10756,7 @@
         </p:nvSpPr>
         <p:spPr>
           <a:xfrm>
-            <a:off x="9966198" y="3506724"/>
+            <a:off x="10088118" y="3506724"/>
             <a:ext cx="118872" cy="118872"/>
           </a:xfrm>
           <a:prstGeom prst="ellipse">
@@ -10781,8 +10781,8 @@
         </p:nvSpPr>
         <p:spPr>
           <a:xfrm>
-            <a:off x="8754618" y="3131820"/>
-            <a:ext cx="408432" cy="381000"/>
+            <a:off x="8704834" y="3068320"/>
+            <a:ext cx="508000" cy="508000"/>
           </a:xfrm>
           <a:prstGeom prst="rect">
             <a:avLst/>
@@ -10798,7 +10798,7 @@
               <a:buNone/>
             </a:pPr>
             <a:r>
-              <a:rPr lang="ko-KR" altLang="en-US" sz="2400" b="1" dirty="0">
+              <a:rPr lang="ko-KR" altLang="en-US" sz="3200" b="1" dirty="0">
                 <a:solidFill>
                   <a:srgbClr val="1F2937"/>
                 </a:solidFill>
@@ -10808,7 +10808,7 @@
               </a:rPr>
               <a:t>ㅇ</a:t>
             </a:r>
-            <a:endParaRPr lang="ko-KR" sz="2400" dirty="0"/>
+            <a:endParaRPr lang="ko-KR" sz="3200" dirty="0"/>
           </a:p>
         </p:txBody>
       </p:sp>
